--- a/module-4-claude-api/01-deck/revised/Module 4 - Building with the Claude API (Backend & Integration) - REVISED.pptx
+++ b/module-4-claude-api/01-deck/revised/Module 4 - Building with the Claude API (Backend & Integration) - REVISED.pptx
@@ -27914,166 +27914,6 @@
               <a:sym typeface="Open Sans"/>
             </a:endParaRPr>
           </a:p>
-          <a:p>
-            <a:pPr indent="0" lvl="0" marL="0" marR="0" rtl="0" algn="ctr">
-              <a:lnSpc>
-                <a:spcPct val="150000"/>
-              </a:lnSpc>
-              <a:spcBef>
-                <a:spcPts val="0"/>
-              </a:spcBef>
-              <a:spcAft>
-                <a:spcPts val="0"/>
-              </a:spcAft>
-              <a:buClr>
-                <a:srgbClr val="000000"/>
-              </a:buClr>
-              <a:buSzPts val="2400"/>
-              <a:buFont typeface="Arial"/>
-              <a:buNone/>
-            </a:pPr>
-            <a:r>
-              <a:rPr b="0" i="0" lang="en-US" sz="2400" u="none" cap="none" strike="noStrike">
-                <a:solidFill>
-                  <a:schemeClr val="dk1"/>
-                </a:solidFill>
-                <a:latin typeface="Open Sans"/>
-                <a:ea typeface="Open Sans"/>
-                <a:cs typeface="Open Sans"/>
-                <a:sym typeface="Open Sans"/>
-              </a:rPr>
-              <a:t>Analyze the provided code snippets for potential prompt injection vulnerability risks.</a:t>
-            </a:r>
-            <a:endParaRPr b="0" i="0" sz="2400" u="none" cap="none" strike="noStrike">
-              <a:solidFill>
-                <a:schemeClr val="dk1"/>
-              </a:solidFill>
-              <a:latin typeface="Open Sans"/>
-              <a:ea typeface="Open Sans"/>
-              <a:cs typeface="Open Sans"/>
-              <a:sym typeface="Open Sans"/>
-            </a:endParaRPr>
-          </a:p>
-          <a:p>
-            <a:pPr indent="0" lvl="0" marL="0" marR="0" rtl="0" algn="ctr">
-              <a:lnSpc>
-                <a:spcPct val="150000"/>
-              </a:lnSpc>
-              <a:spcBef>
-                <a:spcPts val="0"/>
-              </a:spcBef>
-              <a:spcAft>
-                <a:spcPts val="0"/>
-              </a:spcAft>
-              <a:buClr>
-                <a:srgbClr val="000000"/>
-              </a:buClr>
-              <a:buSzPts val="2400"/>
-              <a:buFont typeface="Arial"/>
-              <a:buNone/>
-            </a:pPr>
-            <a:r>
-              <a:rPr b="0" i="0" lang="en-US" sz="2400" u="none" cap="none" strike="noStrike">
-                <a:solidFill>
-                  <a:schemeClr val="dk1"/>
-                </a:solidFill>
-                <a:latin typeface="Open Sans"/>
-                <a:ea typeface="Open Sans"/>
-                <a:cs typeface="Open Sans"/>
-                <a:sym typeface="Open Sans"/>
-              </a:rPr>
-              <a:t>Examine the context management strategy you chose in Exercise 12, and its cost.</a:t>
-            </a:r>
-            <a:endParaRPr b="0" i="0" sz="2400" u="none" cap="none" strike="noStrike">
-              <a:solidFill>
-                <a:schemeClr val="dk1"/>
-              </a:solidFill>
-              <a:latin typeface="Open Sans"/>
-              <a:ea typeface="Open Sans"/>
-              <a:cs typeface="Open Sans"/>
-              <a:sym typeface="Open Sans"/>
-            </a:endParaRPr>
-          </a:p>
-          <a:p>
-            <a:pPr indent="0" lvl="0" marL="0" marR="0" rtl="0" algn="ctr">
-              <a:lnSpc>
-                <a:spcPct val="150000"/>
-              </a:lnSpc>
-              <a:spcBef>
-                <a:spcPts val="0"/>
-              </a:spcBef>
-              <a:spcAft>
-                <a:spcPts val="0"/>
-              </a:spcAft>
-              <a:buClr>
-                <a:srgbClr val="000000"/>
-              </a:buClr>
-              <a:buSzPts val="2400"/>
-              <a:buFont typeface="Arial"/>
-              <a:buNone/>
-            </a:pPr>
-            <a:r>
-              <a:rPr b="0" i="0" lang="en-US" sz="2400" u="none" cap="none" strike="noStrike">
-                <a:solidFill>
-                  <a:schemeClr val="dk1"/>
-                </a:solidFill>
-                <a:latin typeface="Open Sans"/>
-                <a:ea typeface="Open Sans"/>
-                <a:cs typeface="Open Sans"/>
-                <a:sym typeface="Open Sans"/>
-              </a:rPr>
-              <a:t>Identify flaws in how your own design handles session state persistence.</a:t>
-            </a:r>
-            <a:endParaRPr b="0" i="0" sz="2400" u="none" cap="none" strike="noStrike">
-              <a:solidFill>
-                <a:schemeClr val="dk1"/>
-              </a:solidFill>
-              <a:latin typeface="Open Sans"/>
-              <a:ea typeface="Open Sans"/>
-              <a:cs typeface="Open Sans"/>
-              <a:sym typeface="Open Sans"/>
-            </a:endParaRPr>
-          </a:p>
-          <a:p>
-            <a:pPr indent="0" lvl="0" marL="0" marR="0" rtl="0" algn="ctr">
-              <a:lnSpc>
-                <a:spcPct val="150000"/>
-              </a:lnSpc>
-              <a:spcBef>
-                <a:spcPts val="0"/>
-              </a:spcBef>
-              <a:spcAft>
-                <a:spcPts val="0"/>
-              </a:spcAft>
-              <a:buClr>
-                <a:srgbClr val="000000"/>
-              </a:buClr>
-              <a:buSzPts val="2400"/>
-              <a:buFont typeface="Arial"/>
-              <a:buNone/>
-            </a:pPr>
-            <a:r>
-              <a:rPr b="0" i="0" lang="en-US" sz="2400" u="none" cap="none" strike="noStrike">
-                <a:solidFill>
-                  <a:schemeClr val="dk1"/>
-                </a:solidFill>
-                <a:latin typeface="Open Sans"/>
-                <a:ea typeface="Open Sans"/>
-                <a:cs typeface="Open Sans"/>
-                <a:sym typeface="Open Sans"/>
-              </a:rPr>
-              <a:t>Prepare notes on efficiency, security, and scalability for your capstone design.</a:t>
-            </a:r>
-            <a:endParaRPr b="0" i="0" sz="2400" u="none" cap="none" strike="noStrike">
-              <a:solidFill>
-                <a:schemeClr val="dk1"/>
-              </a:solidFill>
-              <a:latin typeface="Open Sans"/>
-              <a:ea typeface="Open Sans"/>
-              <a:cs typeface="Open Sans"/>
-              <a:sym typeface="Open Sans"/>
-            </a:endParaRPr>
-          </a:p>
         </p:txBody>
       </p:sp>
       <p:sp>
@@ -28145,7 +27985,7 @@
                 <a:cs typeface="Open Sans"/>
                 <a:sym typeface="Open Sans"/>
               </a:rPr>
-              <a:t>Analyze the provided code snippets for potential prompt injection vulnerability risks.</a:t>
+              <a:t>Analyze your own code for prompt injection risk in the untrusted input path.</a:t>
             </a:r>
             <a:endParaRPr b="0" i="0" sz="2400" u="none" cap="none" strike="noStrike">
               <a:solidFill>
@@ -28228,7 +28068,7 @@
                 <a:cs typeface="Open Sans"/>
                 <a:sym typeface="Open Sans"/>
               </a:rPr>
-              <a:t>Examine the context management strategy proposed for an enterprise chatbot solution.</a:t>
+              <a:t>Examine the context management strategy you chose in Exercise 12, and its cost.</a:t>
             </a:r>
             <a:endParaRPr b="0" i="0" sz="2400" u="none" cap="none" strike="noStrike">
               <a:solidFill>
@@ -28311,7 +28151,7 @@
                 <a:cs typeface="Open Sans"/>
                 <a:sym typeface="Open Sans"/>
               </a:rPr>
-              <a:t>Identify flaws in how the suggested architectures handle session state persistence.</a:t>
+              <a:t>Identify flaws in how your own design handles session state persistence.</a:t>
             </a:r>
             <a:endParaRPr b="0" i="0" sz="2400" u="none" cap="none" strike="noStrike">
               <a:solidFill>
@@ -28394,7 +28234,7 @@
                 <a:cs typeface="Open Sans"/>
                 <a:sym typeface="Open Sans"/>
               </a:rPr>
-              <a:t>Prepare notes on efficiency, security, and scalability for each proposed solution.</a:t>
+              <a:t>Prepare notes on efficiency, security and scalability for your capstone design.</a:t>
             </a:r>
             <a:endParaRPr b="0" i="0" sz="2400" u="none" cap="none" strike="noStrike">
               <a:solidFill>
